--- a/presentation/3-Ensemble-4-Kmeansclustering.pptx
+++ b/presentation/3-Ensemble-4-Kmeansclustering.pptx
@@ -29,7 +29,10 @@
     <p:sldId id="279" r:id="rId23"/>
     <p:sldId id="288" r:id="rId24"/>
     <p:sldId id="289" r:id="rId25"/>
-    <p:sldId id="265" r:id="rId26"/>
+    <p:sldId id="290" r:id="rId26"/>
+    <p:sldId id="291" r:id="rId27"/>
+    <p:sldId id="292" r:id="rId28"/>
+    <p:sldId id="265" r:id="rId29"/>
   </p:sldIdLst>
   <p:sldSz cx="12192000" cy="6858000"/>
   <p:notesSz cx="6858000" cy="9144000"/>
@@ -285,7 +288,7 @@
           <a:p>
             <a:fld id="{A9965EDE-A042-4BC5-93A5-730E3DD5C701}" type="datetimeFigureOut">
               <a:rPr lang="en-IN" smtClean="0"/>
-              <a:t>17-09-2025</a:t>
+              <a:t>18-09-2025</a:t>
             </a:fld>
             <a:endParaRPr lang="en-IN"/>
           </a:p>
@@ -485,7 +488,7 @@
           <a:p>
             <a:fld id="{A9965EDE-A042-4BC5-93A5-730E3DD5C701}" type="datetimeFigureOut">
               <a:rPr lang="en-IN" smtClean="0"/>
-              <a:t>17-09-2025</a:t>
+              <a:t>18-09-2025</a:t>
             </a:fld>
             <a:endParaRPr lang="en-IN"/>
           </a:p>
@@ -695,7 +698,7 @@
           <a:p>
             <a:fld id="{A9965EDE-A042-4BC5-93A5-730E3DD5C701}" type="datetimeFigureOut">
               <a:rPr lang="en-IN" smtClean="0"/>
-              <a:t>17-09-2025</a:t>
+              <a:t>18-09-2025</a:t>
             </a:fld>
             <a:endParaRPr lang="en-IN"/>
           </a:p>
@@ -895,7 +898,7 @@
           <a:p>
             <a:fld id="{A9965EDE-A042-4BC5-93A5-730E3DD5C701}" type="datetimeFigureOut">
               <a:rPr lang="en-IN" smtClean="0"/>
-              <a:t>17-09-2025</a:t>
+              <a:t>18-09-2025</a:t>
             </a:fld>
             <a:endParaRPr lang="en-IN"/>
           </a:p>
@@ -1171,7 +1174,7 @@
           <a:p>
             <a:fld id="{A9965EDE-A042-4BC5-93A5-730E3DD5C701}" type="datetimeFigureOut">
               <a:rPr lang="en-IN" smtClean="0"/>
-              <a:t>17-09-2025</a:t>
+              <a:t>18-09-2025</a:t>
             </a:fld>
             <a:endParaRPr lang="en-IN"/>
           </a:p>
@@ -1439,7 +1442,7 @@
           <a:p>
             <a:fld id="{A9965EDE-A042-4BC5-93A5-730E3DD5C701}" type="datetimeFigureOut">
               <a:rPr lang="en-IN" smtClean="0"/>
-              <a:t>17-09-2025</a:t>
+              <a:t>18-09-2025</a:t>
             </a:fld>
             <a:endParaRPr lang="en-IN"/>
           </a:p>
@@ -1854,7 +1857,7 @@
           <a:p>
             <a:fld id="{A9965EDE-A042-4BC5-93A5-730E3DD5C701}" type="datetimeFigureOut">
               <a:rPr lang="en-IN" smtClean="0"/>
-              <a:t>17-09-2025</a:t>
+              <a:t>18-09-2025</a:t>
             </a:fld>
             <a:endParaRPr lang="en-IN"/>
           </a:p>
@@ -1996,7 +1999,7 @@
           <a:p>
             <a:fld id="{A9965EDE-A042-4BC5-93A5-730E3DD5C701}" type="datetimeFigureOut">
               <a:rPr lang="en-IN" smtClean="0"/>
-              <a:t>17-09-2025</a:t>
+              <a:t>18-09-2025</a:t>
             </a:fld>
             <a:endParaRPr lang="en-IN"/>
           </a:p>
@@ -2109,7 +2112,7 @@
           <a:p>
             <a:fld id="{A9965EDE-A042-4BC5-93A5-730E3DD5C701}" type="datetimeFigureOut">
               <a:rPr lang="en-IN" smtClean="0"/>
-              <a:t>17-09-2025</a:t>
+              <a:t>18-09-2025</a:t>
             </a:fld>
             <a:endParaRPr lang="en-IN"/>
           </a:p>
@@ -2422,7 +2425,7 @@
           <a:p>
             <a:fld id="{A9965EDE-A042-4BC5-93A5-730E3DD5C701}" type="datetimeFigureOut">
               <a:rPr lang="en-IN" smtClean="0"/>
-              <a:t>17-09-2025</a:t>
+              <a:t>18-09-2025</a:t>
             </a:fld>
             <a:endParaRPr lang="en-IN"/>
           </a:p>
@@ -2711,7 +2714,7 @@
           <a:p>
             <a:fld id="{A9965EDE-A042-4BC5-93A5-730E3DD5C701}" type="datetimeFigureOut">
               <a:rPr lang="en-IN" smtClean="0"/>
-              <a:t>17-09-2025</a:t>
+              <a:t>18-09-2025</a:t>
             </a:fld>
             <a:endParaRPr lang="en-IN"/>
           </a:p>
@@ -2954,7 +2957,7 @@
           <a:p>
             <a:fld id="{A9965EDE-A042-4BC5-93A5-730E3DD5C701}" type="datetimeFigureOut">
               <a:rPr lang="en-IN" smtClean="0"/>
-              <a:t>17-09-2025</a:t>
+              <a:t>18-09-2025</a:t>
             </a:fld>
             <a:endParaRPr lang="en-IN"/>
           </a:p>
@@ -5384,6 +5387,384 @@
 </file>
 
 <file path=ppt/slides/slide25.xml><?xml version="1.0" encoding="utf-8"?>
+<p:sld xmlns:a="http://schemas.openxmlformats.org/drawingml/2006/main" xmlns:r="http://schemas.openxmlformats.org/officeDocument/2006/relationships" xmlns:p="http://schemas.openxmlformats.org/presentationml/2006/main">
+  <p:cSld>
+    <p:spTree>
+      <p:nvGrpSpPr>
+        <p:cNvPr id="1" name="">
+          <a:extLst>
+            <a:ext uri="{FF2B5EF4-FFF2-40B4-BE49-F238E27FC236}">
+              <a16:creationId xmlns:a16="http://schemas.microsoft.com/office/drawing/2014/main" id="{FBF3C1EA-FF4D-F7A6-598B-5FBABDC09F19}"/>
+            </a:ext>
+          </a:extLst>
+        </p:cNvPr>
+        <p:cNvGrpSpPr/>
+        <p:nvPr/>
+      </p:nvGrpSpPr>
+      <p:grpSpPr>
+        <a:xfrm>
+          <a:off x="0" y="0"/>
+          <a:ext cx="0" cy="0"/>
+          <a:chOff x="0" y="0"/>
+          <a:chExt cx="0" cy="0"/>
+        </a:xfrm>
+      </p:grpSpPr>
+      <p:sp>
+        <p:nvSpPr>
+          <p:cNvPr id="2" name="Title 1">
+            <a:extLst>
+              <a:ext uri="{FF2B5EF4-FFF2-40B4-BE49-F238E27FC236}">
+                <a16:creationId xmlns:a16="http://schemas.microsoft.com/office/drawing/2014/main" id="{C2215398-331D-AF61-985B-6E91B07C771B}"/>
+              </a:ext>
+            </a:extLst>
+          </p:cNvPr>
+          <p:cNvSpPr>
+            <a:spLocks noGrp="1"/>
+          </p:cNvSpPr>
+          <p:nvPr>
+            <p:ph type="title"/>
+          </p:nvPr>
+        </p:nvSpPr>
+        <p:spPr/>
+        <p:txBody>
+          <a:bodyPr/>
+          <a:lstStyle/>
+          <a:p>
+            <a:r>
+              <a:rPr lang="en-US" dirty="0" err="1"/>
+              <a:t>Competative</a:t>
+            </a:r>
+            <a:r>
+              <a:rPr lang="en-US" dirty="0"/>
+              <a:t> Learning</a:t>
+            </a:r>
+            <a:endParaRPr lang="en-IN" dirty="0"/>
+          </a:p>
+        </p:txBody>
+      </p:sp>
+      <p:sp>
+        <p:nvSpPr>
+          <p:cNvPr id="3" name="Content Placeholder 2">
+            <a:extLst>
+              <a:ext uri="{FF2B5EF4-FFF2-40B4-BE49-F238E27FC236}">
+                <a16:creationId xmlns:a16="http://schemas.microsoft.com/office/drawing/2014/main" id="{9A18F708-970C-D5DD-CD15-09E424A9DCDD}"/>
+              </a:ext>
+            </a:extLst>
+          </p:cNvPr>
+          <p:cNvSpPr>
+            <a:spLocks noGrp="1"/>
+          </p:cNvSpPr>
+          <p:nvPr>
+            <p:ph idx="1"/>
+          </p:nvPr>
+        </p:nvSpPr>
+        <p:spPr/>
+        <p:txBody>
+          <a:bodyPr>
+            <a:normAutofit/>
+          </a:bodyPr>
+          <a:lstStyle/>
+          <a:p>
+            <a:endParaRPr lang="en-IN" dirty="0"/>
+          </a:p>
+        </p:txBody>
+      </p:sp>
+      <p:pic>
+        <p:nvPicPr>
+          <p:cNvPr id="5" name="Picture 4">
+            <a:extLst>
+              <a:ext uri="{FF2B5EF4-FFF2-40B4-BE49-F238E27FC236}">
+                <a16:creationId xmlns:a16="http://schemas.microsoft.com/office/drawing/2014/main" id="{B1744BD1-66A1-0B1C-955F-D43F336366C7}"/>
+              </a:ext>
+            </a:extLst>
+          </p:cNvPr>
+          <p:cNvPicPr>
+            <a:picLocks noChangeAspect="1"/>
+          </p:cNvPicPr>
+          <p:nvPr/>
+        </p:nvPicPr>
+        <p:blipFill>
+          <a:blip r:embed="rId2"/>
+          <a:stretch>
+            <a:fillRect/>
+          </a:stretch>
+        </p:blipFill>
+        <p:spPr>
+          <a:xfrm>
+            <a:off x="766915" y="1804378"/>
+            <a:ext cx="9271819" cy="4372585"/>
+          </a:xfrm>
+          <a:prstGeom prst="rect">
+            <a:avLst/>
+          </a:prstGeom>
+        </p:spPr>
+      </p:pic>
+    </p:spTree>
+    <p:extLst>
+      <p:ext uri="{BB962C8B-B14F-4D97-AF65-F5344CB8AC3E}">
+        <p14:creationId xmlns:p14="http://schemas.microsoft.com/office/powerpoint/2010/main" val="3763871947"/>
+      </p:ext>
+    </p:extLst>
+  </p:cSld>
+  <p:clrMapOvr>
+    <a:masterClrMapping/>
+  </p:clrMapOvr>
+</p:sld>
+</file>
+
+<file path=ppt/slides/slide26.xml><?xml version="1.0" encoding="utf-8"?>
+<p:sld xmlns:a="http://schemas.openxmlformats.org/drawingml/2006/main" xmlns:r="http://schemas.openxmlformats.org/officeDocument/2006/relationships" xmlns:p="http://schemas.openxmlformats.org/presentationml/2006/main">
+  <p:cSld>
+    <p:spTree>
+      <p:nvGrpSpPr>
+        <p:cNvPr id="1" name="">
+          <a:extLst>
+            <a:ext uri="{FF2B5EF4-FFF2-40B4-BE49-F238E27FC236}">
+              <a16:creationId xmlns:a16="http://schemas.microsoft.com/office/drawing/2014/main" id="{3596F115-6846-51F9-23C9-008742D2BDE5}"/>
+            </a:ext>
+          </a:extLst>
+        </p:cNvPr>
+        <p:cNvGrpSpPr/>
+        <p:nvPr/>
+      </p:nvGrpSpPr>
+      <p:grpSpPr>
+        <a:xfrm>
+          <a:off x="0" y="0"/>
+          <a:ext cx="0" cy="0"/>
+          <a:chOff x="0" y="0"/>
+          <a:chExt cx="0" cy="0"/>
+        </a:xfrm>
+      </p:grpSpPr>
+      <p:sp>
+        <p:nvSpPr>
+          <p:cNvPr id="2" name="Title 1">
+            <a:extLst>
+              <a:ext uri="{FF2B5EF4-FFF2-40B4-BE49-F238E27FC236}">
+                <a16:creationId xmlns:a16="http://schemas.microsoft.com/office/drawing/2014/main" id="{2FBAE37A-B2C9-F75D-475C-46AEE5B3F332}"/>
+              </a:ext>
+            </a:extLst>
+          </p:cNvPr>
+          <p:cNvSpPr>
+            <a:spLocks noGrp="1"/>
+          </p:cNvSpPr>
+          <p:nvPr>
+            <p:ph type="title"/>
+          </p:nvPr>
+        </p:nvSpPr>
+        <p:spPr/>
+        <p:txBody>
+          <a:bodyPr/>
+          <a:lstStyle/>
+          <a:p>
+            <a:r>
+              <a:rPr lang="en-US" dirty="0" err="1"/>
+              <a:t>Competative</a:t>
+            </a:r>
+            <a:r>
+              <a:rPr lang="en-US" dirty="0"/>
+              <a:t> Learning</a:t>
+            </a:r>
+            <a:endParaRPr lang="en-IN" dirty="0"/>
+          </a:p>
+        </p:txBody>
+      </p:sp>
+      <p:sp>
+        <p:nvSpPr>
+          <p:cNvPr id="3" name="Content Placeholder 2">
+            <a:extLst>
+              <a:ext uri="{FF2B5EF4-FFF2-40B4-BE49-F238E27FC236}">
+                <a16:creationId xmlns:a16="http://schemas.microsoft.com/office/drawing/2014/main" id="{254C778D-5776-E7C0-C311-FA2DC325B261}"/>
+              </a:ext>
+            </a:extLst>
+          </p:cNvPr>
+          <p:cNvSpPr>
+            <a:spLocks noGrp="1"/>
+          </p:cNvSpPr>
+          <p:nvPr>
+            <p:ph idx="1"/>
+          </p:nvPr>
+        </p:nvSpPr>
+        <p:spPr/>
+        <p:txBody>
+          <a:bodyPr>
+            <a:normAutofit/>
+          </a:bodyPr>
+          <a:lstStyle/>
+          <a:p>
+            <a:endParaRPr lang="en-IN" dirty="0"/>
+          </a:p>
+        </p:txBody>
+      </p:sp>
+      <p:pic>
+        <p:nvPicPr>
+          <p:cNvPr id="6" name="Picture 5">
+            <a:extLst>
+              <a:ext uri="{FF2B5EF4-FFF2-40B4-BE49-F238E27FC236}">
+                <a16:creationId xmlns:a16="http://schemas.microsoft.com/office/drawing/2014/main" id="{97B32D97-6B3C-27F1-A698-8D5B5DAC764C}"/>
+              </a:ext>
+            </a:extLst>
+          </p:cNvPr>
+          <p:cNvPicPr>
+            <a:picLocks noChangeAspect="1"/>
+          </p:cNvPicPr>
+          <p:nvPr/>
+        </p:nvPicPr>
+        <p:blipFill>
+          <a:blip r:embed="rId2"/>
+          <a:stretch>
+            <a:fillRect/>
+          </a:stretch>
+        </p:blipFill>
+        <p:spPr>
+          <a:xfrm>
+            <a:off x="838200" y="1825625"/>
+            <a:ext cx="9741309" cy="4223115"/>
+          </a:xfrm>
+          <a:prstGeom prst="rect">
+            <a:avLst/>
+          </a:prstGeom>
+        </p:spPr>
+      </p:pic>
+    </p:spTree>
+    <p:extLst>
+      <p:ext uri="{BB962C8B-B14F-4D97-AF65-F5344CB8AC3E}">
+        <p14:creationId xmlns:p14="http://schemas.microsoft.com/office/powerpoint/2010/main" val="3301251747"/>
+      </p:ext>
+    </p:extLst>
+  </p:cSld>
+  <p:clrMapOvr>
+    <a:masterClrMapping/>
+  </p:clrMapOvr>
+</p:sld>
+</file>
+
+<file path=ppt/slides/slide27.xml><?xml version="1.0" encoding="utf-8"?>
+<p:sld xmlns:a="http://schemas.openxmlformats.org/drawingml/2006/main" xmlns:r="http://schemas.openxmlformats.org/officeDocument/2006/relationships" xmlns:p="http://schemas.openxmlformats.org/presentationml/2006/main">
+  <p:cSld>
+    <p:spTree>
+      <p:nvGrpSpPr>
+        <p:cNvPr id="1" name="">
+          <a:extLst>
+            <a:ext uri="{FF2B5EF4-FFF2-40B4-BE49-F238E27FC236}">
+              <a16:creationId xmlns:a16="http://schemas.microsoft.com/office/drawing/2014/main" id="{D998E50B-959F-A2BE-8C8E-F5098B1E6C95}"/>
+            </a:ext>
+          </a:extLst>
+        </p:cNvPr>
+        <p:cNvGrpSpPr/>
+        <p:nvPr/>
+      </p:nvGrpSpPr>
+      <p:grpSpPr>
+        <a:xfrm>
+          <a:off x="0" y="0"/>
+          <a:ext cx="0" cy="0"/>
+          <a:chOff x="0" y="0"/>
+          <a:chExt cx="0" cy="0"/>
+        </a:xfrm>
+      </p:grpSpPr>
+      <p:sp>
+        <p:nvSpPr>
+          <p:cNvPr id="2" name="Title 1">
+            <a:extLst>
+              <a:ext uri="{FF2B5EF4-FFF2-40B4-BE49-F238E27FC236}">
+                <a16:creationId xmlns:a16="http://schemas.microsoft.com/office/drawing/2014/main" id="{1158A3D6-C03C-B248-5F80-E415F14397BC}"/>
+              </a:ext>
+            </a:extLst>
+          </p:cNvPr>
+          <p:cNvSpPr>
+            <a:spLocks noGrp="1"/>
+          </p:cNvSpPr>
+          <p:nvPr>
+            <p:ph type="title"/>
+          </p:nvPr>
+        </p:nvSpPr>
+        <p:spPr/>
+        <p:txBody>
+          <a:bodyPr/>
+          <a:lstStyle/>
+          <a:p>
+            <a:r>
+              <a:rPr lang="en-US" dirty="0" err="1"/>
+              <a:t>Competative</a:t>
+            </a:r>
+            <a:r>
+              <a:rPr lang="en-US" dirty="0"/>
+              <a:t> Learning</a:t>
+            </a:r>
+            <a:endParaRPr lang="en-IN" dirty="0"/>
+          </a:p>
+        </p:txBody>
+      </p:sp>
+      <p:sp>
+        <p:nvSpPr>
+          <p:cNvPr id="3" name="Content Placeholder 2">
+            <a:extLst>
+              <a:ext uri="{FF2B5EF4-FFF2-40B4-BE49-F238E27FC236}">
+                <a16:creationId xmlns:a16="http://schemas.microsoft.com/office/drawing/2014/main" id="{F859D345-6DED-217F-9B09-8F389C521BCB}"/>
+              </a:ext>
+            </a:extLst>
+          </p:cNvPr>
+          <p:cNvSpPr>
+            <a:spLocks noGrp="1"/>
+          </p:cNvSpPr>
+          <p:nvPr>
+            <p:ph idx="1"/>
+          </p:nvPr>
+        </p:nvSpPr>
+        <p:spPr/>
+        <p:txBody>
+          <a:bodyPr>
+            <a:normAutofit/>
+          </a:bodyPr>
+          <a:lstStyle/>
+          <a:p>
+            <a:endParaRPr lang="en-IN" dirty="0"/>
+          </a:p>
+        </p:txBody>
+      </p:sp>
+      <p:pic>
+        <p:nvPicPr>
+          <p:cNvPr id="5" name="Picture 4">
+            <a:extLst>
+              <a:ext uri="{FF2B5EF4-FFF2-40B4-BE49-F238E27FC236}">
+                <a16:creationId xmlns:a16="http://schemas.microsoft.com/office/drawing/2014/main" id="{03666A31-AB3C-BE01-120C-7F76311A8502}"/>
+              </a:ext>
+            </a:extLst>
+          </p:cNvPr>
+          <p:cNvPicPr>
+            <a:picLocks noChangeAspect="1"/>
+          </p:cNvPicPr>
+          <p:nvPr/>
+        </p:nvPicPr>
+        <p:blipFill>
+          <a:blip r:embed="rId2"/>
+          <a:stretch>
+            <a:fillRect/>
+          </a:stretch>
+        </p:blipFill>
+        <p:spPr>
+          <a:xfrm>
+            <a:off x="838200" y="1825624"/>
+            <a:ext cx="10262419" cy="4351337"/>
+          </a:xfrm>
+          <a:prstGeom prst="rect">
+            <a:avLst/>
+          </a:prstGeom>
+        </p:spPr>
+      </p:pic>
+    </p:spTree>
+    <p:extLst>
+      <p:ext uri="{BB962C8B-B14F-4D97-AF65-F5344CB8AC3E}">
+        <p14:creationId xmlns:p14="http://schemas.microsoft.com/office/powerpoint/2010/main" val="3408655483"/>
+      </p:ext>
+    </p:extLst>
+  </p:cSld>
+  <p:clrMapOvr>
+    <a:masterClrMapping/>
+  </p:clrMapOvr>
+</p:sld>
+</file>
+
+<file path=ppt/slides/slide28.xml><?xml version="1.0" encoding="utf-8"?>
 <p:sld xmlns:a="http://schemas.openxmlformats.org/drawingml/2006/main" xmlns:r="http://schemas.openxmlformats.org/officeDocument/2006/relationships" xmlns:p="http://schemas.openxmlformats.org/presentationml/2006/main">
   <p:cSld>
     <p:spTree>
